--- a/artifacts/speaking-portfolio-expanded/talks/adaptive-systems/adaptive-systems-screen.pptx
+++ b/artifacts/speaking-portfolio-expanded/talks/adaptive-systems/adaptive-systems-screen.pptx
@@ -199,7 +199,7 @@
                 <a:ea typeface="Arial"/>
                 <a:cs typeface="Arial"/>
               </a:rPr>
-              <a:t xml:space="preserve">![HTTP success does not establish that the payload still matches your contract.](../../reveal-talks/assets/adaptive-systems/01-a-successful-response-can-break-ingest.svg)</a:t>
+              <a:t xml:space="preserve">![HTTP success does not establish that the payload still matches your contract.](../../../../public/talks/assets/adaptive-systems/01-a-successful-response-can-break-ingest.svg)</a:t>
             </a:r>
             <a:endParaRPr lang="en-US" sz="1200"/>
           </a:p>
@@ -726,7 +726,7 @@
                 <a:ea typeface="Arial"/>
                 <a:cs typeface="Arial"/>
               </a:rPr>
-              <a:t xml:space="preserve">![Recovery, quarantine and reconciliation are all legitimate outcomes of the same ingest job.](../../reveal-talks/assets/adaptive-systems/10-three-events-require-three-decisions.svg)</a:t>
+              <a:t xml:space="preserve">![Recovery, quarantine and reconciliation are all legitimate outcomes of the same ingest job.](../../../../public/talks/assets/adaptive-systems/10-three-events-require-three-decisions.svg)</a:t>
             </a:r>
             <a:endParaRPr lang="en-US" sz="1200"/>
           </a:p>
@@ -1253,7 +1253,7 @@
                 <a:ea typeface="Arial"/>
                 <a:cs typeface="Arial"/>
               </a:rPr>
-              <a:t xml:space="preserve">![The orchestrator requests shape, size and duration inside a per-customer ceiling; the scheduler resolves it against a catalog and issues a lease.](../../reveal-talks/assets/adaptive-systems/11-scale-becomes-a-capability.svg)</a:t>
+              <a:t xml:space="preserve">![The orchestrator requests shape, size and duration inside a per-customer ceiling; the scheduler resolves it against a catalog and issues a lease.](../../../../public/talks/assets/adaptive-systems/11-scale-becomes-a-capability.svg)</a:t>
             </a:r>
             <a:endParaRPr lang="en-US" sz="1200"/>
           </a:p>
@@ -4116,7 +4116,7 @@
                 <a:ea typeface="Arial"/>
                 <a:cs typeface="Arial"/>
               </a:rPr>
-              <a:t xml:space="preserve">![Every integration multiplies the pathways from something the agent can read to something it can do; nobody reviews the combinations.](../../reveal-talks/assets/adaptive-systems/03-the-assistant-with-everything.svg)</a:t>
+              <a:t xml:space="preserve">![Every integration multiplies the pathways from something the agent can read to something it can do; nobody reviews the combinations.](../../../../public/talks/assets/adaptive-systems/03-the-assistant-with-everything.svg)</a:t>
             </a:r>
             <a:endParaRPr lang="en-US" sz="1200"/>
           </a:p>
@@ -4735,7 +4735,7 @@
                 <a:ea typeface="Arial"/>
                 <a:cs typeface="Arial"/>
               </a:rPr>
-              <a:t xml:space="preserve">![The orchestrator writes a tailored prompt, selects the minimum tools from a catalog, and loops until the job is done or must stop.](../../reveal-talks/assets/adaptive-systems/04-conjure-the-agent-the-job-needs.svg)</a:t>
+              <a:t xml:space="preserve">![The orchestrator writes a tailored prompt, selects the minimum tools from a catalog, and loops until the job is done or must stop.](../../../../public/talks/assets/adaptive-systems/04-conjure-the-agent-the-job-needs.svg)</a:t>
             </a:r>
             <a:endParaRPr lang="en-US" sz="1200"/>
           </a:p>
@@ -5308,7 +5308,7 @@
                 <a:ea typeface="Arial"/>
                 <a:cs typeface="Arial"/>
               </a:rPr>
-              <a:t xml:space="preserve">![Proposed boundary: the dispatcher grants worker access; only allowlisted status returns to the planner.](../../reveal-talks/assets/adaptive-systems/13-keep-access-capabilities-out-of-the-planner.svg)</a:t>
+              <a:t xml:space="preserve">![Proposed boundary: the dispatcher grants worker access; only allowlisted status returns to the planner.](../../../../public/talks/assets/adaptive-systems/13-keep-access-capabilities-out-of-the-planner.svg)</a:t>
             </a:r>
             <a:endParaRPr lang="en-US" sz="1200"/>
           </a:p>
@@ -5927,7 +5927,7 @@
                 <a:ea typeface="Arial"/>
                 <a:cs typeface="Arial"/>
               </a:rPr>
-              <a:t xml:space="preserve">![A documented rename can preserve meaning; an undefined business state needs an owner.](../../reveal-talks/assets/adaptive-systems/04-a-rename-is-not-a-new-meaning.svg)</a:t>
+              <a:t xml:space="preserve">![A documented rename can preserve meaning; an undefined business state needs an owner.](../../../../public/talks/assets/adaptive-systems/04-a-rename-is-not-a-new-meaning.svg)</a:t>
             </a:r>
             <a:endParaRPr lang="en-US" sz="1200"/>
           </a:p>
@@ -6385,7 +6385,7 @@
                 <a:ea typeface="Arial"/>
                 <a:cs typeface="Arial"/>
               </a:rPr>
-              <a:t xml:space="preserve">![Promote a tested mapping within its allowed scope; reconcile writes if you roll back.](../../reveal-talks/assets/adaptive-systems/05-a-repair-has-a-version-and-a-scope.svg)</a:t>
+              <a:t xml:space="preserve">![Promote a tested mapping within its allowed scope; reconcile writes if you roll back.](../../../../public/talks/assets/adaptive-systems/05-a-repair-has-a-version-and-a-scope.svg)</a:t>
             </a:r>
             <a:endParaRPr lang="en-US" sz="1200"/>
           </a:p>
@@ -7209,7 +7209,7 @@
                 <a:ea typeface="Arial"/>
                 <a:cs typeface="Arial"/>
               </a:rPr>
-              <a:t xml:space="preserve">![Reconcile the operation identity before another submission; retain unresolved reservations.](../../reveal-talks/assets/adaptive-systems/09-a-lost-response-leaves-an-unknown-outcome.svg)</a:t>
+              <a:t xml:space="preserve">![Reconcile the operation identity before another submission; retain unresolved reservations.](../../../../public/talks/assets/adaptive-systems/09-a-lost-response-leaves-an-unknown-outcome.svg)</a:t>
             </a:r>
             <a:endParaRPr lang="en-US" sz="1200"/>
           </a:p>
